--- a/dist/weeks-2학기/서비스디자인_2학기_04주차_공통요소확장.pptx
+++ b/dist/weeks-2학기/서비스디자인_2학기_04주차_공통요소확장.pptx
@@ -4354,7 +4354,7 @@
                 <a:ea typeface="Pretendard" pitchFamily="34" charset="-122"/>
                 <a:cs typeface="Pretendard" pitchFamily="34" charset="-120"/>
               </a:rPr>
-              <a:t>60분 · 개인 — 만드는 것보다 적용하는 것이 오늘의 목표입니다.</a:t>
+              <a:t>개인 작업 — 만드는 것보다 적용하는 것이 오늘의 목표입니다.</a:t>
             </a:r>
             <a:endParaRPr lang="en-US" sz="1150" dirty="0"/>
           </a:p>
@@ -5172,7 +5172,7 @@
                 <a:ea typeface="Pretendard" pitchFamily="34" charset="-122"/>
                 <a:cs typeface="Pretendard" pitchFamily="34" charset="-120"/>
               </a:rPr>
-              <a:t>마지막 15분. 2인 1조로 서로의 파일에서 확인합니다.</a:t>
+              <a:t>2인 1조로 서로의 파일에서 확인합니다.</a:t>
             </a:r>
             <a:endParaRPr lang="en-US" sz="1150" dirty="0"/>
           </a:p>

--- a/dist/weeks-2학기/서비스디자인_2학기_04주차_공통요소확장.pptx
+++ b/dist/weeks-2학기/서비스디자인_2학기_04주차_공통요소확장.pptx
@@ -11556,7 +11556,7 @@
                 <a:ea typeface="Pretendard SemiBold" pitchFamily="34" charset="-122"/>
                 <a:cs typeface="Pretendard SemiBold" pitchFamily="34" charset="-120"/>
               </a:rPr>
-              <a:t>간격은 여섯 개면 충분합니다</a:t>
+              <a:t>간격 여섯 단계</a:t>
             </a:r>
             <a:endParaRPr lang="en-US" sz="3000" dirty="0"/>
           </a:p>
